--- a/proposals/機種分析/アズールレーン/azurlane_guide_v1.pptx
+++ b/proposals/機種分析/アズールレーン/azurlane_guide_v1.pptx
@@ -3363,7 +3363,7 @@
         <p:spPr>
           <a:xfrm>
             <a:off x="201168" y="2743200"/>
-            <a:ext cx="1554480" cy="210000"/>
+            <a:ext cx="1554480" cy="183000"/>
           </a:xfrm>
           <a:prstGeom prst="rect">
             <a:avLst/>
@@ -3378,7 +3378,7 @@
           <a:p>
             <a:pPr algn="l"/>
             <a:r>
-              <a:rPr sz="750" b="0">
+              <a:rPr sz="700" b="0">
                 <a:solidFill>
                   <a:srgbClr val="889AAA"/>
                 </a:solidFill>
@@ -3398,7 +3398,7 @@
         <p:spPr>
           <a:xfrm>
             <a:off x="1755648" y="2743200"/>
-            <a:ext cx="3017520" cy="210000"/>
+            <a:ext cx="3017520" cy="183000"/>
           </a:xfrm>
           <a:prstGeom prst="rect">
             <a:avLst/>
@@ -3413,7 +3413,7 @@
           <a:p>
             <a:pPr algn="l"/>
             <a:r>
-              <a:rPr sz="750" b="1">
+              <a:rPr sz="700" b="1">
                 <a:solidFill>
                   <a:srgbClr val="ECF0F8"/>
                 </a:solidFill>
@@ -3432,8 +3432,8 @@
         </p:nvSpPr>
         <p:spPr>
           <a:xfrm>
-            <a:off x="201168" y="2968200"/>
-            <a:ext cx="1554480" cy="210000"/>
+            <a:off x="201168" y="2938200"/>
+            <a:ext cx="1554480" cy="183000"/>
           </a:xfrm>
           <a:prstGeom prst="rect">
             <a:avLst/>
@@ -3448,7 +3448,7 @@
           <a:p>
             <a:pPr algn="l"/>
             <a:r>
-              <a:rPr sz="750" b="0">
+              <a:rPr sz="700" b="0">
                 <a:solidFill>
                   <a:srgbClr val="889AAA"/>
                 </a:solidFill>
@@ -3467,8 +3467,8 @@
         </p:nvSpPr>
         <p:spPr>
           <a:xfrm>
-            <a:off x="1755648" y="2968200"/>
-            <a:ext cx="3017520" cy="210000"/>
+            <a:off x="1755648" y="2938200"/>
+            <a:ext cx="3017520" cy="183000"/>
           </a:xfrm>
           <a:prstGeom prst="rect">
             <a:avLst/>
@@ -3483,7 +3483,7 @@
           <a:p>
             <a:pPr algn="l"/>
             <a:r>
-              <a:rPr sz="750" b="1">
+              <a:rPr sz="700" b="1">
                 <a:solidFill>
                   <a:srgbClr val="ECF0F8"/>
                 </a:solidFill>
@@ -3502,8 +3502,8 @@
         </p:nvSpPr>
         <p:spPr>
           <a:xfrm>
-            <a:off x="201168" y="3193200"/>
-            <a:ext cx="1554480" cy="210000"/>
+            <a:off x="201168" y="3133200"/>
+            <a:ext cx="1554480" cy="183000"/>
           </a:xfrm>
           <a:prstGeom prst="rect">
             <a:avLst/>
@@ -3518,7 +3518,7 @@
           <a:p>
             <a:pPr algn="l"/>
             <a:r>
-              <a:rPr sz="750" b="0">
+              <a:rPr sz="700" b="0">
                 <a:solidFill>
                   <a:srgbClr val="889AAA"/>
                 </a:solidFill>
@@ -3537,8 +3537,8 @@
         </p:nvSpPr>
         <p:spPr>
           <a:xfrm>
-            <a:off x="1755648" y="3193200"/>
-            <a:ext cx="3017520" cy="210000"/>
+            <a:off x="1755648" y="3133200"/>
+            <a:ext cx="3017520" cy="183000"/>
           </a:xfrm>
           <a:prstGeom prst="rect">
             <a:avLst/>
@@ -3553,13 +3553,13 @@
           <a:p>
             <a:pPr algn="l"/>
             <a:r>
-              <a:rPr sz="750" b="1">
+              <a:rPr sz="700" b="1">
                 <a:solidFill>
                   <a:srgbClr val="ECF0F8"/>
                 </a:solidFill>
                 <a:latin typeface="メイリオ"/>
               </a:rPr>
-              <a:t>約2.5枚/G（通常AT） / 約5.1枚/G（上位AT）</a:t>
+              <a:t>約2.5枚/G（通常AT）/ 約5.1枚/G（上位AT）</a:t>
             </a:r>
           </a:p>
         </p:txBody>
@@ -3572,8 +3572,8 @@
         </p:nvSpPr>
         <p:spPr>
           <a:xfrm>
-            <a:off x="201168" y="3418200"/>
-            <a:ext cx="1554480" cy="210000"/>
+            <a:off x="201168" y="3328200"/>
+            <a:ext cx="1554480" cy="183000"/>
           </a:xfrm>
           <a:prstGeom prst="rect">
             <a:avLst/>
@@ -3588,7 +3588,7 @@
           <a:p>
             <a:pPr algn="l"/>
             <a:r>
-              <a:rPr sz="750" b="0">
+              <a:rPr sz="700" b="0">
                 <a:solidFill>
                   <a:srgbClr val="889AAA"/>
                 </a:solidFill>
@@ -3607,8 +3607,8 @@
         </p:nvSpPr>
         <p:spPr>
           <a:xfrm>
-            <a:off x="1755648" y="3418200"/>
-            <a:ext cx="3017520" cy="210000"/>
+            <a:off x="1755648" y="3328200"/>
+            <a:ext cx="3017520" cy="183000"/>
           </a:xfrm>
           <a:prstGeom prst="rect">
             <a:avLst/>
@@ -3623,7 +3623,7 @@
           <a:p>
             <a:pPr algn="l"/>
             <a:r>
-              <a:rPr sz="750" b="1">
+              <a:rPr sz="700" b="1">
                 <a:solidFill>
                   <a:srgbClr val="ECF0F8"/>
                 </a:solidFill>
@@ -3642,8 +3642,8 @@
         </p:nvSpPr>
         <p:spPr>
           <a:xfrm>
-            <a:off x="201168" y="3643200"/>
-            <a:ext cx="1554480" cy="210000"/>
+            <a:off x="201168" y="3523200"/>
+            <a:ext cx="1554480" cy="183000"/>
           </a:xfrm>
           <a:prstGeom prst="rect">
             <a:avLst/>
@@ -3658,7 +3658,7 @@
           <a:p>
             <a:pPr algn="l"/>
             <a:r>
-              <a:rPr sz="750" b="0">
+              <a:rPr sz="700" b="0">
                 <a:solidFill>
                   <a:srgbClr val="889AAA"/>
                 </a:solidFill>
@@ -3677,8 +3677,8 @@
         </p:nvSpPr>
         <p:spPr>
           <a:xfrm>
-            <a:off x="1755648" y="3643200"/>
-            <a:ext cx="3017520" cy="210000"/>
+            <a:off x="1755648" y="3523200"/>
+            <a:ext cx="3017520" cy="183000"/>
           </a:xfrm>
           <a:prstGeom prst="rect">
             <a:avLst/>
@@ -3693,7 +3693,7 @@
           <a:p>
             <a:pPr algn="l"/>
             <a:r>
-              <a:rPr sz="750" b="1">
+              <a:rPr sz="700" b="1">
                 <a:solidFill>
                   <a:srgbClr val="ECF0F8"/>
                 </a:solidFill>
@@ -3712,8 +3712,8 @@
         </p:nvSpPr>
         <p:spPr>
           <a:xfrm>
-            <a:off x="201168" y="3868200"/>
-            <a:ext cx="1554480" cy="210000"/>
+            <a:off x="201168" y="3718200"/>
+            <a:ext cx="1554480" cy="183000"/>
           </a:xfrm>
           <a:prstGeom prst="rect">
             <a:avLst/>
@@ -3728,7 +3728,7 @@
           <a:p>
             <a:pPr algn="l"/>
             <a:r>
-              <a:rPr sz="750" b="0">
+              <a:rPr sz="700" b="0">
                 <a:solidFill>
                   <a:srgbClr val="889AAA"/>
                 </a:solidFill>
@@ -3747,8 +3747,8 @@
         </p:nvSpPr>
         <p:spPr>
           <a:xfrm>
-            <a:off x="1755648" y="3868200"/>
-            <a:ext cx="3017520" cy="210000"/>
+            <a:off x="1755648" y="3718200"/>
+            <a:ext cx="3017520" cy="183000"/>
           </a:xfrm>
           <a:prstGeom prst="rect">
             <a:avLst/>
@@ -3763,7 +3763,7 @@
           <a:p>
             <a:pPr algn="l"/>
             <a:r>
-              <a:rPr sz="750" b="1">
+              <a:rPr sz="700" b="1">
                 <a:solidFill>
                   <a:srgbClr val="ECF0F8"/>
                 </a:solidFill>
@@ -3782,8 +3782,8 @@
         </p:nvSpPr>
         <p:spPr>
           <a:xfrm>
-            <a:off x="201168" y="4093200"/>
-            <a:ext cx="1554480" cy="210000"/>
+            <a:off x="201168" y="3913200"/>
+            <a:ext cx="1554480" cy="183000"/>
           </a:xfrm>
           <a:prstGeom prst="rect">
             <a:avLst/>
@@ -3798,7 +3798,7 @@
           <a:p>
             <a:pPr algn="l"/>
             <a:r>
-              <a:rPr sz="750" b="0">
+              <a:rPr sz="700" b="0">
                 <a:solidFill>
                   <a:srgbClr val="889AAA"/>
                 </a:solidFill>
@@ -3817,8 +3817,8 @@
         </p:nvSpPr>
         <p:spPr>
           <a:xfrm>
-            <a:off x="1755648" y="4093200"/>
-            <a:ext cx="3017520" cy="210000"/>
+            <a:off x="1755648" y="3913200"/>
+            <a:ext cx="3017520" cy="183000"/>
           </a:xfrm>
           <a:prstGeom prst="rect">
             <a:avLst/>
@@ -3833,7 +3833,7 @@
           <a:p>
             <a:pPr algn="l"/>
             <a:r>
-              <a:rPr sz="750" b="1">
+              <a:rPr sz="700" b="1">
                 <a:solidFill>
                   <a:srgbClr val="ECF0F8"/>
                 </a:solidFill>
@@ -3852,8 +3852,8 @@
         </p:nvSpPr>
         <p:spPr>
           <a:xfrm>
-            <a:off x="201168" y="4318200"/>
-            <a:ext cx="1554480" cy="210000"/>
+            <a:off x="201168" y="4108200"/>
+            <a:ext cx="1554480" cy="183000"/>
           </a:xfrm>
           <a:prstGeom prst="rect">
             <a:avLst/>
@@ -3868,13 +3868,13 @@
           <a:p>
             <a:pPr algn="l"/>
             <a:r>
-              <a:rPr sz="750" b="0">
+              <a:rPr sz="700" b="0">
                 <a:solidFill>
                   <a:srgbClr val="889AAA"/>
                 </a:solidFill>
                 <a:latin typeface="メイリオ"/>
               </a:rPr>
-              <a:t>天井②（スルー）</a:t>
+              <a:t>天井②スルー</a:t>
             </a:r>
           </a:p>
         </p:txBody>
@@ -3887,8 +3887,8 @@
         </p:nvSpPr>
         <p:spPr>
           <a:xfrm>
-            <a:off x="1755648" y="4318200"/>
-            <a:ext cx="3017520" cy="210000"/>
+            <a:off x="1755648" y="4108200"/>
+            <a:ext cx="3017520" cy="183000"/>
           </a:xfrm>
           <a:prstGeom prst="rect">
             <a:avLst/>
@@ -3903,13 +3903,13 @@
           <a:p>
             <a:pPr algn="l"/>
             <a:r>
-              <a:rPr sz="750" b="1">
+              <a:rPr sz="700" b="1">
                 <a:solidFill>
                   <a:srgbClr val="ECF0F8"/>
                 </a:solidFill>
                 <a:latin typeface="メイリオ"/>
               </a:rPr>
-              <a:t>9スルー目（10回目のボーナスでAT確定）</a:t>
+              <a:t>9スルーで10回目AT確定（リセット後6スルー）</a:t>
             </a:r>
           </a:p>
         </p:txBody>
@@ -3922,8 +3922,8 @@
         </p:nvSpPr>
         <p:spPr>
           <a:xfrm>
-            <a:off x="201168" y="4543200"/>
-            <a:ext cx="1554480" cy="210000"/>
+            <a:off x="201168" y="4303200"/>
+            <a:ext cx="1554480" cy="183000"/>
           </a:xfrm>
           <a:prstGeom prst="rect">
             <a:avLst/>
@@ -3938,13 +3938,13 @@
           <a:p>
             <a:pPr algn="l"/>
             <a:r>
-              <a:rPr sz="750" b="0">
+              <a:rPr sz="700" b="0">
                 <a:solidFill>
                   <a:srgbClr val="889AAA"/>
                 </a:solidFill>
                 <a:latin typeface="メイリオ"/>
               </a:rPr>
-              <a:t>リセット短縮</a:t>
+              <a:t>コイン持ち</a:t>
             </a:r>
           </a:p>
         </p:txBody>
@@ -3957,8 +3957,8 @@
         </p:nvSpPr>
         <p:spPr>
           <a:xfrm>
-            <a:off x="1755648" y="4543200"/>
-            <a:ext cx="3017520" cy="210000"/>
+            <a:off x="1755648" y="4303200"/>
+            <a:ext cx="3017520" cy="183000"/>
           </a:xfrm>
           <a:prstGeom prst="rect">
             <a:avLst/>
@@ -3973,82 +3973,12 @@
           <a:p>
             <a:pPr algn="l"/>
             <a:r>
-              <a:rPr sz="750" b="1">
+              <a:rPr sz="700" b="1">
                 <a:solidFill>
                   <a:srgbClr val="ECF0F8"/>
                 </a:solidFill>
                 <a:latin typeface="メイリオ"/>
               </a:rPr>
-              <a:t>リセット時スルー天井6回（7回目でAT）</a:t>
-            </a:r>
-          </a:p>
-        </p:txBody>
-      </p:sp>
-      <p:sp>
-        <p:nvSpPr>
-          <p:cNvPr id="27" name="TextBox 26"/>
-          <p:cNvSpPr txBox="1"/>
-          <p:nvPr/>
-        </p:nvSpPr>
-        <p:spPr>
-          <a:xfrm>
-            <a:off x="201168" y="4768200"/>
-            <a:ext cx="1554480" cy="210000"/>
-          </a:xfrm>
-          <a:prstGeom prst="rect">
-            <a:avLst/>
-          </a:prstGeom>
-          <a:noFill/>
-        </p:spPr>
-        <p:txBody>
-          <a:bodyPr wrap="square">
-            <a:spAutoFit/>
-          </a:bodyPr>
-          <a:lstStyle/>
-          <a:p>
-            <a:pPr algn="l"/>
-            <a:r>
-              <a:rPr sz="750" b="0">
-                <a:solidFill>
-                  <a:srgbClr val="889AAA"/>
-                </a:solidFill>
-                <a:latin typeface="メイリオ"/>
-              </a:rPr>
-              <a:t>コイン持ち</a:t>
-            </a:r>
-          </a:p>
-        </p:txBody>
-      </p:sp>
-      <p:sp>
-        <p:nvSpPr>
-          <p:cNvPr id="28" name="TextBox 27"/>
-          <p:cNvSpPr txBox="1"/>
-          <p:nvPr/>
-        </p:nvSpPr>
-        <p:spPr>
-          <a:xfrm>
-            <a:off x="1755648" y="4768200"/>
-            <a:ext cx="3017520" cy="210000"/>
-          </a:xfrm>
-          <a:prstGeom prst="rect">
-            <a:avLst/>
-          </a:prstGeom>
-          <a:noFill/>
-        </p:spPr>
-        <p:txBody>
-          <a:bodyPr wrap="square">
-            <a:spAutoFit/>
-          </a:bodyPr>
-          <a:lstStyle/>
-          <a:p>
-            <a:pPr algn="l"/>
-            <a:r>
-              <a:rPr sz="750" b="1">
-                <a:solidFill>
-                  <a:srgbClr val="ECF0F8"/>
-                </a:solidFill>
-                <a:latin typeface="メイリオ"/>
-              </a:rPr>
               <a:t>50枚あたり約25.8G（低持ち設計）</a:t>
             </a:r>
           </a:p>
@@ -4056,7 +3986,7 @@
       </p:sp>
       <p:sp>
         <p:nvSpPr>
-          <p:cNvPr id="29" name="Rectangle 28"/>
+          <p:cNvPr id="27" name="Rectangle 26"/>
           <p:cNvSpPr/>
           <p:nvPr/>
         </p:nvSpPr>
@@ -4101,7 +4031,7 @@
       </p:sp>
       <p:sp>
         <p:nvSpPr>
-          <p:cNvPr id="30" name="Rectangle 29"/>
+          <p:cNvPr id="28" name="Rectangle 27"/>
           <p:cNvSpPr/>
           <p:nvPr/>
         </p:nvSpPr>
@@ -4144,7 +4074,7 @@
       </p:sp>
       <p:sp>
         <p:nvSpPr>
-          <p:cNvPr id="31" name="TextBox 30"/>
+          <p:cNvPr id="29" name="TextBox 28"/>
           <p:cNvSpPr txBox="1"/>
           <p:nvPr/>
         </p:nvSpPr>
@@ -4179,7 +4109,7 @@
       </p:sp>
       <p:sp>
         <p:nvSpPr>
-          <p:cNvPr id="32" name="TextBox 31"/>
+          <p:cNvPr id="30" name="TextBox 29"/>
           <p:cNvSpPr txBox="1"/>
           <p:nvPr/>
         </p:nvSpPr>
@@ -4216,7 +4146,7 @@
       </p:sp>
       <p:sp>
         <p:nvSpPr>
-          <p:cNvPr id="33" name="Rectangle 32"/>
+          <p:cNvPr id="31" name="Rectangle 30"/>
           <p:cNvSpPr/>
           <p:nvPr/>
         </p:nvSpPr>
@@ -4261,7 +4191,7 @@
       </p:sp>
       <p:sp>
         <p:nvSpPr>
-          <p:cNvPr id="34" name="Rectangle 33"/>
+          <p:cNvPr id="32" name="Rectangle 31"/>
           <p:cNvSpPr/>
           <p:nvPr/>
         </p:nvSpPr>
@@ -4304,7 +4234,7 @@
       </p:sp>
       <p:sp>
         <p:nvSpPr>
-          <p:cNvPr id="35" name="TextBox 34"/>
+          <p:cNvPr id="33" name="TextBox 32"/>
           <p:cNvSpPr txBox="1"/>
           <p:nvPr/>
         </p:nvSpPr>
@@ -4339,7 +4269,7 @@
       </p:sp>
       <p:sp>
         <p:nvSpPr>
-          <p:cNvPr id="36" name="TextBox 35"/>
+          <p:cNvPr id="34" name="TextBox 33"/>
           <p:cNvSpPr txBox="1"/>
           <p:nvPr/>
         </p:nvSpPr>
@@ -4376,7 +4306,7 @@
       </p:sp>
       <p:sp>
         <p:nvSpPr>
-          <p:cNvPr id="37" name="Rectangle 36"/>
+          <p:cNvPr id="35" name="Rectangle 34"/>
           <p:cNvSpPr/>
           <p:nvPr/>
         </p:nvSpPr>
@@ -4421,7 +4351,7 @@
       </p:sp>
       <p:sp>
         <p:nvSpPr>
-          <p:cNvPr id="38" name="Rectangle 37"/>
+          <p:cNvPr id="36" name="Rectangle 35"/>
           <p:cNvSpPr/>
           <p:nvPr/>
         </p:nvSpPr>
@@ -4464,7 +4394,7 @@
       </p:sp>
       <p:sp>
         <p:nvSpPr>
-          <p:cNvPr id="39" name="TextBox 38"/>
+          <p:cNvPr id="37" name="TextBox 36"/>
           <p:cNvSpPr txBox="1"/>
           <p:nvPr/>
         </p:nvSpPr>
@@ -4499,7 +4429,7 @@
       </p:sp>
       <p:sp>
         <p:nvSpPr>
-          <p:cNvPr id="40" name="TextBox 39"/>
+          <p:cNvPr id="38" name="TextBox 37"/>
           <p:cNvSpPr txBox="1"/>
           <p:nvPr/>
         </p:nvSpPr>
@@ -4536,7 +4466,7 @@
       </p:sp>
       <p:sp>
         <p:nvSpPr>
-          <p:cNvPr id="41" name="TextBox 40"/>
+          <p:cNvPr id="39" name="TextBox 38"/>
           <p:cNvSpPr txBox="1"/>
           <p:nvPr/>
         </p:nvSpPr>
@@ -4571,7 +4501,7 @@
       </p:sp>
       <p:sp>
         <p:nvSpPr>
-          <p:cNvPr id="42" name="Rectangle 41"/>
+          <p:cNvPr id="40" name="Rectangle 39"/>
           <p:cNvSpPr/>
           <p:nvPr/>
         </p:nvSpPr>
@@ -4614,7 +4544,7 @@
       </p:sp>
       <p:sp>
         <p:nvSpPr>
-          <p:cNvPr id="43" name="Rectangle 42"/>
+          <p:cNvPr id="41" name="Rectangle 40"/>
           <p:cNvSpPr/>
           <p:nvPr/>
         </p:nvSpPr>
@@ -4657,7 +4587,7 @@
       </p:sp>
       <p:sp>
         <p:nvSpPr>
-          <p:cNvPr id="44" name="TextBox 43"/>
+          <p:cNvPr id="42" name="TextBox 41"/>
           <p:cNvSpPr txBox="1"/>
           <p:nvPr/>
         </p:nvSpPr>
@@ -4692,7 +4622,7 @@
       </p:sp>
       <p:sp>
         <p:nvSpPr>
-          <p:cNvPr id="45" name="TextBox 44"/>
+          <p:cNvPr id="43" name="TextBox 42"/>
           <p:cNvSpPr txBox="1"/>
           <p:nvPr/>
         </p:nvSpPr>
@@ -5891,8 +5821,8 @@
         </p:nvSpPr>
         <p:spPr>
           <a:xfrm>
-            <a:off x="256032" y="1993392"/>
-            <a:ext cx="1783080" cy="1080000"/>
+            <a:off x="274320" y="1993392"/>
+            <a:ext cx="1508760" cy="1080000"/>
           </a:xfrm>
           <a:prstGeom prst="rect">
             <a:avLst/>
@@ -5936,23 +5866,23 @@
         </p:nvSpPr>
         <p:spPr>
           <a:xfrm>
-            <a:off x="296032" y="2063392"/>
-            <a:ext cx="1713080" cy="370000"/>
-          </a:xfrm>
-          <a:prstGeom prst="rect">
-            <a:avLst/>
-          </a:prstGeom>
-          <a:noFill/>
-        </p:spPr>
-        <p:txBody>
-          <a:bodyPr wrap="square">
-            <a:spAutoFit/>
-          </a:bodyPr>
-          <a:lstStyle/>
-          <a:p>
-            <a:pPr algn="ctr"/>
-            <a:r>
-              <a:rPr sz="1000" b="1">
+            <a:off x="309320" y="2063392"/>
+            <a:ext cx="1448760" cy="370000"/>
+          </a:xfrm>
+          <a:prstGeom prst="rect">
+            <a:avLst/>
+          </a:prstGeom>
+          <a:noFill/>
+        </p:spPr>
+        <p:txBody>
+          <a:bodyPr wrap="square">
+            <a:spAutoFit/>
+          </a:bodyPr>
+          <a:lstStyle/>
+          <a:p>
+            <a:pPr algn="ctr"/>
+            <a:r>
+              <a:rPr sz="950" b="1">
                 <a:solidFill>
                   <a:srgbClr val="00CCDD"/>
                 </a:solidFill>
@@ -5972,23 +5902,23 @@
         </p:nvSpPr>
         <p:spPr>
           <a:xfrm>
-            <a:off x="286032" y="2483392"/>
-            <a:ext cx="1728080" cy="470000"/>
-          </a:xfrm>
-          <a:prstGeom prst="rect">
-            <a:avLst/>
-          </a:prstGeom>
-          <a:noFill/>
-        </p:spPr>
-        <p:txBody>
-          <a:bodyPr wrap="square">
-            <a:spAutoFit/>
-          </a:bodyPr>
-          <a:lstStyle/>
-          <a:p>
-            <a:pPr algn="ctr"/>
-            <a:r>
-              <a:rPr sz="800" b="0">
+            <a:off x="299320" y="2483392"/>
+            <a:ext cx="1463760" cy="470000"/>
+          </a:xfrm>
+          <a:prstGeom prst="rect">
+            <a:avLst/>
+          </a:prstGeom>
+          <a:noFill/>
+        </p:spPr>
+        <p:txBody>
+          <a:bodyPr wrap="square">
+            <a:spAutoFit/>
+          </a:bodyPr>
+          <a:lstStyle/>
+          <a:p>
+            <a:pPr algn="ctr"/>
+            <a:r>
+              <a:rPr sz="750" b="0">
                 <a:solidFill>
                   <a:srgbClr val="889AAA"/>
                 </a:solidFill>
@@ -6009,7 +5939,7 @@
         </p:nvSpPr>
         <p:spPr>
           <a:xfrm>
-            <a:off x="2051112" y="2443392"/>
+            <a:off x="1791080" y="2443392"/>
             <a:ext cx="200000" cy="180000"/>
           </a:xfrm>
           <a:prstGeom prst="can">
@@ -6052,8 +5982,8 @@
         </p:nvSpPr>
         <p:spPr>
           <a:xfrm>
-            <a:off x="2240280" y="1993392"/>
-            <a:ext cx="1783080" cy="1080000"/>
+            <a:off x="1938528" y="1993392"/>
+            <a:ext cx="1508760" cy="1080000"/>
           </a:xfrm>
           <a:prstGeom prst="rect">
             <a:avLst/>
@@ -6097,23 +6027,23 @@
         </p:nvSpPr>
         <p:spPr>
           <a:xfrm>
-            <a:off x="2280280" y="2063392"/>
-            <a:ext cx="1713080" cy="370000"/>
-          </a:xfrm>
-          <a:prstGeom prst="rect">
-            <a:avLst/>
-          </a:prstGeom>
-          <a:noFill/>
-        </p:spPr>
-        <p:txBody>
-          <a:bodyPr wrap="square">
-            <a:spAutoFit/>
-          </a:bodyPr>
-          <a:lstStyle/>
-          <a:p>
-            <a:pPr algn="ctr"/>
-            <a:r>
-              <a:rPr sz="1000" b="1">
+            <a:off x="1973528" y="2063392"/>
+            <a:ext cx="1448760" cy="370000"/>
+          </a:xfrm>
+          <a:prstGeom prst="rect">
+            <a:avLst/>
+          </a:prstGeom>
+          <a:noFill/>
+        </p:spPr>
+        <p:txBody>
+          <a:bodyPr wrap="square">
+            <a:spAutoFit/>
+          </a:bodyPr>
+          <a:lstStyle/>
+          <a:p>
+            <a:pPr algn="ctr"/>
+            <a:r>
+              <a:rPr sz="950" b="1">
                 <a:solidFill>
                   <a:srgbClr val="00AACC"/>
                 </a:solidFill>
@@ -6133,23 +6063,23 @@
         </p:nvSpPr>
         <p:spPr>
           <a:xfrm>
-            <a:off x="2270280" y="2483392"/>
-            <a:ext cx="1728080" cy="470000"/>
-          </a:xfrm>
-          <a:prstGeom prst="rect">
-            <a:avLst/>
-          </a:prstGeom>
-          <a:noFill/>
-        </p:spPr>
-        <p:txBody>
-          <a:bodyPr wrap="square">
-            <a:spAutoFit/>
-          </a:bodyPr>
-          <a:lstStyle/>
-          <a:p>
-            <a:pPr algn="ctr"/>
-            <a:r>
-              <a:rPr sz="800" b="0">
+            <a:off x="1963528" y="2483392"/>
+            <a:ext cx="1463760" cy="470000"/>
+          </a:xfrm>
+          <a:prstGeom prst="rect">
+            <a:avLst/>
+          </a:prstGeom>
+          <a:noFill/>
+        </p:spPr>
+        <p:txBody>
+          <a:bodyPr wrap="square">
+            <a:spAutoFit/>
+          </a:bodyPr>
+          <a:lstStyle/>
+          <a:p>
+            <a:pPr algn="ctr"/>
+            <a:r>
+              <a:rPr sz="750" b="0">
                 <a:solidFill>
                   <a:srgbClr val="889AAA"/>
                 </a:solidFill>
@@ -6170,7 +6100,7 @@
         </p:nvSpPr>
         <p:spPr>
           <a:xfrm>
-            <a:off x="4035360" y="2443392"/>
+            <a:off x="3455288" y="2443392"/>
             <a:ext cx="200000" cy="180000"/>
           </a:xfrm>
           <a:prstGeom prst="can">
@@ -6213,8 +6143,8 @@
         </p:nvSpPr>
         <p:spPr>
           <a:xfrm>
-            <a:off x="4224528" y="1993392"/>
-            <a:ext cx="1783080" cy="1080000"/>
+            <a:off x="3602736" y="1993392"/>
+            <a:ext cx="1508760" cy="1080000"/>
           </a:xfrm>
           <a:prstGeom prst="rect">
             <a:avLst/>
@@ -6258,23 +6188,23 @@
         </p:nvSpPr>
         <p:spPr>
           <a:xfrm>
-            <a:off x="4264528" y="2063392"/>
-            <a:ext cx="1713080" cy="370000"/>
-          </a:xfrm>
-          <a:prstGeom prst="rect">
-            <a:avLst/>
-          </a:prstGeom>
-          <a:noFill/>
-        </p:spPr>
-        <p:txBody>
-          <a:bodyPr wrap="square">
-            <a:spAutoFit/>
-          </a:bodyPr>
-          <a:lstStyle/>
-          <a:p>
-            <a:pPr algn="ctr"/>
-            <a:r>
-              <a:rPr sz="1000" b="1">
+            <a:off x="3637736" y="2063392"/>
+            <a:ext cx="1448760" cy="370000"/>
+          </a:xfrm>
+          <a:prstGeom prst="rect">
+            <a:avLst/>
+          </a:prstGeom>
+          <a:noFill/>
+        </p:spPr>
+        <p:txBody>
+          <a:bodyPr wrap="square">
+            <a:spAutoFit/>
+          </a:bodyPr>
+          <a:lstStyle/>
+          <a:p>
+            <a:pPr algn="ctr"/>
+            <a:r>
+              <a:rPr sz="950" b="1">
                 <a:solidFill>
                   <a:srgbClr val="C8A840"/>
                 </a:solidFill>
@@ -6294,23 +6224,23 @@
         </p:nvSpPr>
         <p:spPr>
           <a:xfrm>
-            <a:off x="4254528" y="2483392"/>
-            <a:ext cx="1728080" cy="470000"/>
-          </a:xfrm>
-          <a:prstGeom prst="rect">
-            <a:avLst/>
-          </a:prstGeom>
-          <a:noFill/>
-        </p:spPr>
-        <p:txBody>
-          <a:bodyPr wrap="square">
-            <a:spAutoFit/>
-          </a:bodyPr>
-          <a:lstStyle/>
-          <a:p>
-            <a:pPr algn="ctr"/>
-            <a:r>
-              <a:rPr sz="800" b="0">
+            <a:off x="3627736" y="2483392"/>
+            <a:ext cx="1463760" cy="470000"/>
+          </a:xfrm>
+          <a:prstGeom prst="rect">
+            <a:avLst/>
+          </a:prstGeom>
+          <a:noFill/>
+        </p:spPr>
+        <p:txBody>
+          <a:bodyPr wrap="square">
+            <a:spAutoFit/>
+          </a:bodyPr>
+          <a:lstStyle/>
+          <a:p>
+            <a:pPr algn="ctr"/>
+            <a:r>
+              <a:rPr sz="750" b="0">
                 <a:solidFill>
                   <a:srgbClr val="889AAA"/>
                 </a:solidFill>
@@ -6331,7 +6261,7 @@
         </p:nvSpPr>
         <p:spPr>
           <a:xfrm>
-            <a:off x="6019608" y="2443392"/>
+            <a:off x="5119496" y="2443392"/>
             <a:ext cx="200000" cy="180000"/>
           </a:xfrm>
           <a:prstGeom prst="can">
@@ -6374,8 +6304,8 @@
         </p:nvSpPr>
         <p:spPr>
           <a:xfrm>
-            <a:off x="6208776" y="1993392"/>
-            <a:ext cx="1783080" cy="1080000"/>
+            <a:off x="5266944" y="1993392"/>
+            <a:ext cx="1508760" cy="1080000"/>
           </a:xfrm>
           <a:prstGeom prst="rect">
             <a:avLst/>
@@ -6419,23 +6349,23 @@
         </p:nvSpPr>
         <p:spPr>
           <a:xfrm>
-            <a:off x="6248776" y="2063392"/>
-            <a:ext cx="1713080" cy="370000"/>
-          </a:xfrm>
-          <a:prstGeom prst="rect">
-            <a:avLst/>
-          </a:prstGeom>
-          <a:noFill/>
-        </p:spPr>
-        <p:txBody>
-          <a:bodyPr wrap="square">
-            <a:spAutoFit/>
-          </a:bodyPr>
-          <a:lstStyle/>
-          <a:p>
-            <a:pPr algn="ctr"/>
-            <a:r>
-              <a:rPr sz="1000" b="1">
+            <a:off x="5301944" y="2063392"/>
+            <a:ext cx="1448760" cy="370000"/>
+          </a:xfrm>
+          <a:prstGeom prst="rect">
+            <a:avLst/>
+          </a:prstGeom>
+          <a:noFill/>
+        </p:spPr>
+        <p:txBody>
+          <a:bodyPr wrap="square">
+            <a:spAutoFit/>
+          </a:bodyPr>
+          <a:lstStyle/>
+          <a:p>
+            <a:pPr algn="ctr"/>
+            <a:r>
+              <a:rPr sz="950" b="1">
                 <a:solidFill>
                   <a:srgbClr val="FFCC55"/>
                 </a:solidFill>
@@ -6455,23 +6385,23 @@
         </p:nvSpPr>
         <p:spPr>
           <a:xfrm>
-            <a:off x="6238776" y="2483392"/>
-            <a:ext cx="1728080" cy="470000"/>
-          </a:xfrm>
-          <a:prstGeom prst="rect">
-            <a:avLst/>
-          </a:prstGeom>
-          <a:noFill/>
-        </p:spPr>
-        <p:txBody>
-          <a:bodyPr wrap="square">
-            <a:spAutoFit/>
-          </a:bodyPr>
-          <a:lstStyle/>
-          <a:p>
-            <a:pPr algn="ctr"/>
-            <a:r>
-              <a:rPr sz="800" b="0">
+            <a:off x="5291944" y="2483392"/>
+            <a:ext cx="1463760" cy="470000"/>
+          </a:xfrm>
+          <a:prstGeom prst="rect">
+            <a:avLst/>
+          </a:prstGeom>
+          <a:noFill/>
+        </p:spPr>
+        <p:txBody>
+          <a:bodyPr wrap="square">
+            <a:spAutoFit/>
+          </a:bodyPr>
+          <a:lstStyle/>
+          <a:p>
+            <a:pPr algn="ctr"/>
+            <a:r>
+              <a:rPr sz="750" b="0">
                 <a:solidFill>
                   <a:srgbClr val="889AAA"/>
                 </a:solidFill>
@@ -6486,25 +6416,23 @@
       </p:sp>
       <p:sp>
         <p:nvSpPr>
-          <p:cNvPr id="46" name="Rectangle 45"/>
+          <p:cNvPr id="46" name="Can 45"/>
           <p:cNvSpPr/>
           <p:nvPr/>
         </p:nvSpPr>
         <p:spPr>
           <a:xfrm>
-            <a:off x="8193024" y="1993392"/>
-            <a:ext cx="1417320" cy="1080000"/>
-          </a:xfrm>
-          <a:prstGeom prst="rect">
-            <a:avLst/>
-          </a:prstGeom>
-          <a:solidFill>
-            <a:srgbClr val="060E22"/>
-          </a:solidFill>
-          <a:ln w="19050">
-            <a:solidFill>
-              <a:srgbClr val="FF66AA"/>
-            </a:solidFill>
+            <a:off x="6783704" y="2443392"/>
+            <a:ext cx="200000" cy="180000"/>
+          </a:xfrm>
+          <a:prstGeom prst="can">
+            <a:avLst/>
+          </a:prstGeom>
+          <a:solidFill>
+            <a:srgbClr val="00CCDD"/>
+          </a:solidFill>
+          <a:ln>
+            <a:noFill/>
           </a:ln>
         </p:spPr>
         <p:style>
@@ -6537,17 +6465,19 @@
         </p:nvSpPr>
         <p:spPr>
           <a:xfrm>
-            <a:off x="8193024" y="1993392"/>
-            <a:ext cx="30000" cy="1080000"/>
-          </a:xfrm>
-          <a:prstGeom prst="rect">
-            <a:avLst/>
-          </a:prstGeom>
-          <a:solidFill>
-            <a:srgbClr val="FF66AA"/>
-          </a:solidFill>
-          <a:ln>
-            <a:noFill/>
+            <a:off x="6931152" y="1993392"/>
+            <a:ext cx="1508760" cy="1080000"/>
+          </a:xfrm>
+          <a:prstGeom prst="rect">
+            <a:avLst/>
+          </a:prstGeom>
+          <a:solidFill>
+            <a:srgbClr val="060E22"/>
+          </a:solidFill>
+          <a:ln w="22860">
+            <a:solidFill>
+              <a:srgbClr val="FF66AA"/>
+            </a:solidFill>
           </a:ln>
         </p:spPr>
         <p:style>
@@ -6580,31 +6510,30 @@
         </p:nvSpPr>
         <p:spPr>
           <a:xfrm>
-            <a:off x="8243024" y="2063392"/>
-            <a:ext cx="1188720" cy="310000"/>
-          </a:xfrm>
-          <a:prstGeom prst="rect">
-            <a:avLst/>
-          </a:prstGeom>
-          <a:noFill/>
-        </p:spPr>
-        <p:txBody>
-          <a:bodyPr wrap="square">
-            <a:spAutoFit/>
-          </a:bodyPr>
-          <a:lstStyle/>
-          <a:p>
-            <a:pPr algn="ctr"/>
-            <a:r>
-              <a:rPr sz="900" b="1">
+            <a:off x="6966152" y="2063392"/>
+            <a:ext cx="1448760" cy="370000"/>
+          </a:xfrm>
+          <a:prstGeom prst="rect">
+            <a:avLst/>
+          </a:prstGeom>
+          <a:noFill/>
+        </p:spPr>
+        <p:txBody>
+          <a:bodyPr wrap="square">
+            <a:spAutoFit/>
+          </a:bodyPr>
+          <a:lstStyle/>
+          <a:p>
+            <a:pPr algn="ctr"/>
+            <a:r>
+              <a:rPr sz="950" b="1">
                 <a:solidFill>
                   <a:srgbClr val="FF66AA"/>
                 </a:solidFill>
                 <a:latin typeface="游明朝"/>
               </a:rPr>
               <a:t>共同戦線
-RUSH
-(特化)</a:t>
+RUSH(特化)</a:t>
             </a:r>
           </a:p>
         </p:txBody>
@@ -6617,8 +6546,8 @@
         </p:nvSpPr>
         <p:spPr>
           <a:xfrm>
-            <a:off x="8243024" y="2483392"/>
-            <a:ext cx="1188720" cy="460000"/>
+            <a:off x="6956152" y="2483392"/>
+            <a:ext cx="1463760" cy="470000"/>
           </a:xfrm>
           <a:prstGeom prst="rect">
             <a:avLst/>
@@ -6635,7 +6564,7 @@
             <a:r>
               <a:rPr sz="750" b="0">
                 <a:solidFill>
-                  <a:srgbClr val="ECF0F8"/>
+                  <a:srgbClr val="889AAA"/>
                 </a:solidFill>
                 <a:latin typeface="メイリオ"/>
               </a:rPr>
@@ -6654,7 +6583,7 @@
         </p:nvSpPr>
         <p:spPr>
           <a:xfrm>
-            <a:off x="256032" y="3093392"/>
+            <a:off x="274320" y="3093392"/>
             <a:ext cx="4114800" cy="260000"/>
           </a:xfrm>
           <a:prstGeom prst="rect">
@@ -6689,7 +6618,7 @@
         </p:nvSpPr>
         <p:spPr>
           <a:xfrm>
-            <a:off x="256032" y="3333392"/>
+            <a:off x="274320" y="3333392"/>
             <a:ext cx="4114800" cy="5000"/>
           </a:xfrm>
           <a:prstGeom prst="rect">
